--- a/dist/slides/u1-w01-l03.pptx
+++ b/dist/slides/u1-w01-l03.pptx
@@ -2,20 +2,20 @@
 <file path=ppt/presentation.xml><?xml version="1.0" encoding="utf-8"?>
 <p:presentation xmlns:p="http://schemas.openxmlformats.org/presentationml/2006/main">
   <p:sldMasterIdLst>
-    <p:sldMasterId xmlns:r="http://schemas.openxmlformats.org/officeDocument/2006/relationships" id="2147483648" r:id="R6d8ce54748354d59"/>
+    <p:sldMasterId xmlns:r="http://schemas.openxmlformats.org/officeDocument/2006/relationships" id="2147483648" r:id="Ra30bcc08717d48ff"/>
   </p:sldMasterIdLst>
   <p:notesMasterIdLst>
-    <p:notesMasterId xmlns:r="http://schemas.openxmlformats.org/officeDocument/2006/relationships" r:id="Rf265b2a29d9f44da"/>
+    <p:notesMasterId xmlns:r="http://schemas.openxmlformats.org/officeDocument/2006/relationships" r:id="Ra966315f816649b9"/>
   </p:notesMasterIdLst>
   <p:sldIdLst>
-    <p:sldId xmlns:r="http://schemas.openxmlformats.org/officeDocument/2006/relationships" id="256" r:id="R06f7f74c26f64e8b"/>
-    <p:sldId xmlns:r="http://schemas.openxmlformats.org/officeDocument/2006/relationships" id="257" r:id="R0afccfbfc9184fb3"/>
-    <p:sldId xmlns:r="http://schemas.openxmlformats.org/officeDocument/2006/relationships" id="258" r:id="Ra84cea27f42e4f01"/>
-    <p:sldId xmlns:r="http://schemas.openxmlformats.org/officeDocument/2006/relationships" id="259" r:id="Rae3c3ed2bbcc470f"/>
-    <p:sldId xmlns:r="http://schemas.openxmlformats.org/officeDocument/2006/relationships" id="260" r:id="R0ed3315a8879434a"/>
-    <p:sldId xmlns:r="http://schemas.openxmlformats.org/officeDocument/2006/relationships" id="261" r:id="R33f5983dd4074304"/>
-    <p:sldId xmlns:r="http://schemas.openxmlformats.org/officeDocument/2006/relationships" id="262" r:id="Ra3a2f258fb014fbc"/>
-    <p:sldId xmlns:r="http://schemas.openxmlformats.org/officeDocument/2006/relationships" id="263" r:id="Rbff0b0707ab34c04"/>
+    <p:sldId xmlns:r="http://schemas.openxmlformats.org/officeDocument/2006/relationships" id="256" r:id="R99c6cfb32d6846c0"/>
+    <p:sldId xmlns:r="http://schemas.openxmlformats.org/officeDocument/2006/relationships" id="257" r:id="R3d371d7848384dba"/>
+    <p:sldId xmlns:r="http://schemas.openxmlformats.org/officeDocument/2006/relationships" id="258" r:id="Ra05b0447b1354dbb"/>
+    <p:sldId xmlns:r="http://schemas.openxmlformats.org/officeDocument/2006/relationships" id="259" r:id="R8aa4629f45c346e0"/>
+    <p:sldId xmlns:r="http://schemas.openxmlformats.org/officeDocument/2006/relationships" id="260" r:id="Rd4d4763fb9484659"/>
+    <p:sldId xmlns:r="http://schemas.openxmlformats.org/officeDocument/2006/relationships" id="261" r:id="R9f2bfd29f99e4bbe"/>
+    <p:sldId xmlns:r="http://schemas.openxmlformats.org/officeDocument/2006/relationships" id="262" r:id="Re572be80e9fb49a6"/>
+    <p:sldId xmlns:r="http://schemas.openxmlformats.org/officeDocument/2006/relationships" id="263" r:id="R3fa162a9dbda410f"/>
   </p:sldIdLst>
   <p:sldSz cx="12192000" cy="6858000"/>
   <p:notesSz cx="6858000" cy="9144000"/>
@@ -454,6 +454,11 @@
           </a:p>
           <a:p xmlns:a="http://schemas.openxmlformats.org/drawingml/2006/main">
             <a:r>
+              <a:t>Instructional strategy: Learning intention.</a:t>
+            </a:r>
+          </a:p>
+          <a:p xmlns:a="http://schemas.openxmlformats.org/drawingml/2006/main">
+            <a:r>
               <a:t>Learners should already be able to run the badge script. Keep a clean copy available so setup errors do not consume the tracing lesson.</a:t>
             </a:r>
           </a:p>
@@ -554,7 +559,12 @@
           </a:p>
           <a:p xmlns:a="http://schemas.openxmlformats.org/drawingml/2006/main">
             <a:r>
-              <a:t>Expected Total: $15. Ask which line performs the calculation and which displays its result. Let learners predict before running.</a:t>
+              <a:t>Instructional strategy: Retrieval and code annotation.</a:t>
+            </a:r>
+          </a:p>
+          <a:p xmlns:a="http://schemas.openxmlformats.org/drawingml/2006/main">
+            <a:r>
+              <a:t>Learners predict Total: $15 individually before running. Ask them to annotate which line reads input, which calculates and which displays. Compare annotations in pairs. If they treat print as the calculation, trace the total assignment explicitly before moving on.</a:t>
             </a:r>
           </a:p>
           <a:p xmlns:a="http://schemas.openxmlformats.org/drawingml/2006/main">
@@ -650,6 +660,11 @@
           <a:p xmlns:a="http://schemas.openxmlformats.org/drawingml/2006/main">
             <a:r>
               <a:t>Suggested 6 minutes.</a:t>
+            </a:r>
+          </a:p>
+          <a:p xmlns:a="http://schemas.openxmlformats.org/drawingml/2006/main">
+            <a:r>
+              <a:t>Instructional strategy: Success criteria.</a:t>
             </a:r>
           </a:p>
           <a:p xmlns:a="http://schemas.openxmlformats.org/drawingml/2006/main">
@@ -754,7 +769,12 @@
           </a:p>
           <a:p xmlns:a="http://schemas.openxmlformats.org/drawingml/2006/main">
             <a:r>
-              <a:t>Model this trace, then give quantity 2 for independent completion. total has not been assigned before its calculation line. int(input(...)) reads and converts the entered text before binding quantity.</a:t>
+              <a:t>Instructional strategy: Worked trace and faded support.</a:t>
+            </a:r>
+          </a:p>
+          <a:p xmlns:a="http://schemas.openxmlformats.org/drawingml/2006/main">
+            <a:r>
+              <a:t>Think aloud through the model for quantity 4. Cover the model or move off this slide and ask learners to trace quantity 2 using blank rows. Expected price 3, quantity 2, total 6 and output Total: $6. total has no assigned value before its calculation. Support: retain instruction labels. Stretch: explain which values remain unchanged at each line. Check every learner’s total row before the next task.</a:t>
             </a:r>
           </a:p>
           <a:p xmlns:a="http://schemas.openxmlformats.org/drawingml/2006/main">
@@ -854,7 +874,12 @@
           </a:p>
           <a:p xmlns:a="http://schemas.openxmlformats.org/drawingml/2006/main">
             <a:r>
-              <a:t>Expected $2 and $11 at badge price 3. State the zero-order rule explicitly: a different requirement could omit the charge, but this version includes it. Multiplication is evaluated before addition here; detailed operator work follows next week.</a:t>
+              <a:t>Instructional strategy: Guided prediction and code modification.</a:t>
+            </a:r>
+          </a:p>
+          <a:p xmlns:a="http://schemas.openxmlformats.org/drawingml/2006/main">
+            <a:r>
+              <a:t>Model adding PACKAGING = 2 above the total calculation. Learners explain in pairs why packaging is added once, then independently predict quantity 0 ($2) and 3 ($11). Check answers before implementation. Contrast the stated zero-order rule with possible alternative requirements without changing this task. Multiplication precedes addition here.</a:t>
             </a:r>
           </a:p>
           <a:p xmlns:a="http://schemas.openxmlformats.org/drawingml/2006/main">
@@ -954,7 +979,12 @@
           </a:p>
           <a:p xmlns:a="http://schemas.openxmlformats.org/drawingml/2006/main">
             <a:r>
-              <a:t>Learners implement the modification and run each case. Ask them to keep the expected results unchanged if actual output differs; investigate the calculation instead. For a fixed charge, quantity * (3 + 2) is a useful contrasting fault: it charges packaging per badge.</a:t>
+              <a:t>Instructional strategy: Paired testing with role changes.</a:t>
+            </a:r>
+          </a:p>
+          <a:p xmlns:a="http://schemas.openxmlformats.org/drawingml/2006/main">
+            <a:r>
+              <a:t>Driver implements and runs the modification. Navigator checks the requirement and compares expected with actual output. Swap roles after the first case. Every learner keeps their own test record. Expected $2, $5, $11. Keep expected values unchanged when actual differs. Support: provide the correct input and output lines. Stretch: find a quantity where an incorrect packaging-per-item calculation accidentally passes (quantity 1).</a:t>
             </a:r>
           </a:p>
           <a:p xmlns:a="http://schemas.openxmlformats.org/drawingml/2006/main">
@@ -1054,7 +1084,12 @@
           </a:p>
           <a:p xmlns:a="http://schemas.openxmlformats.org/drawingml/2006/main">
             <a:r>
-              <a:t>For quantity 3, the intended expression gives 11 while the second gives 15. Neither expression is a syntax error. Have learners explain the requirement in words before fixing the expression.</a:t>
+              <a:t>Instructional strategy: Hinge question and error analysis.</a:t>
+            </a:r>
+          </a:p>
+          <a:p xmlns:a="http://schemas.openxmlformats.org/drawingml/2006/main">
+            <a:r>
+              <a:t>Take simultaneous A/B responses before partner discussion. A gives $11 and B gives $15. Both are syntactically valid, so B is a logic error for this requirement. Quantity 1 produces $5 for both and cannot distinguish them. If several choose B, model one packaging charge separately and recheck quantity 2: $8 versus $10. A syntax error prevents Python parsing the instructions.</a:t>
             </a:r>
           </a:p>
           <a:p xmlns:a="http://schemas.openxmlformats.org/drawingml/2006/main">
@@ -1154,7 +1189,12 @@
           </a:p>
           <a:p xmlns:a="http://schemas.openxmlformats.org/drawingml/2006/main">
             <a:r>
-              <a:t>Expected $20. Quantity 0 should give $2 under the explicit rule. Look for an independently calculated expectation and a test record, not simply ‘it ran’.</a:t>
+              <a:t>Instructional strategy: Independent exit ticket.</a:t>
+            </a:r>
+          </a:p>
+          <a:p xmlns:a="http://schemas.openxmlformats.org/drawingml/2006/main">
+            <a:r>
+              <a:t>Collect individual responses: quantity 6 gives $20 and quantity 0 gives $2. A zero test exposes the packaging-per-item fault because it gives $0. Look for a requirement-based explanation and an independent expected result. Use errors to choose a brief trace or fixed-charge starter next lesson.</a:t>
             </a:r>
           </a:p>
           <a:p xmlns:a="http://schemas.openxmlformats.org/drawingml/2006/main">
@@ -1226,7 +1266,7 @@
           <p:cNvPr id="3" name="Title">
             <a:extLst xmlns:a="http://schemas.openxmlformats.org/drawingml/2006/main">
               <a:ext uri="{FF2B5EF4-FFF2-40B4-BE49-F238E27FC236}">
-                <a16:creationId xmlns:a16="http://schemas.microsoft.com/office/drawing/2014/main" id="{B7E6A5FF-30EC-47E1-ACD5-F9E7F353DD38}"/>
+                <a16:creationId xmlns:a16="http://schemas.microsoft.com/office/drawing/2014/main" id="{3A7F317F-857A-4872-AAD5-2C4D4851D3D9}"/>
               </a:ext>
             </a:extLst>
           </p:cNvPr>
@@ -1383,7 +1423,7 @@
           <p:cNvPr id="2" name="Subtitle">
             <a:extLst xmlns:a="http://schemas.openxmlformats.org/drawingml/2006/main">
               <a:ext uri="{FF2B5EF4-FFF2-40B4-BE49-F238E27FC236}">
-                <a16:creationId xmlns:a16="http://schemas.microsoft.com/office/drawing/2014/main" id="{482BF3CE-C731-4415-B8D7-560BC63AD506}"/>
+                <a16:creationId xmlns:a16="http://schemas.microsoft.com/office/drawing/2014/main" id="{3D7FFBFF-0968-4EDF-85C8-4C59780530D3}"/>
               </a:ext>
             </a:extLst>
           </p:cNvPr>
@@ -1557,7 +1597,7 @@
           <p:cNvPr id="2" name="Section title">
             <a:extLst xmlns:a="http://schemas.openxmlformats.org/drawingml/2006/main">
               <a:ext uri="{FF2B5EF4-FFF2-40B4-BE49-F238E27FC236}">
-                <a16:creationId xmlns:a16="http://schemas.microsoft.com/office/drawing/2014/main" id="{1D1C31AD-CF64-4099-B210-A71BFBD31E4E}"/>
+                <a16:creationId xmlns:a16="http://schemas.microsoft.com/office/drawing/2014/main" id="{949D97F9-7F01-42A1-9A8E-EF20A7970BF6}"/>
               </a:ext>
             </a:extLst>
           </p:cNvPr>
@@ -1731,7 +1771,7 @@
           <p:cNvPr id="3" name="Title">
             <a:extLst xmlns:a="http://schemas.openxmlformats.org/drawingml/2006/main">
               <a:ext uri="{FF2B5EF4-FFF2-40B4-BE49-F238E27FC236}">
-                <a16:creationId xmlns:a16="http://schemas.microsoft.com/office/drawing/2014/main" id="{0D1350E0-92FA-46C0-91F6-0D909697A341}"/>
+                <a16:creationId xmlns:a16="http://schemas.microsoft.com/office/drawing/2014/main" id="{5DCE6E66-34EE-4899-9305-3E198C4B8024}"/>
               </a:ext>
             </a:extLst>
           </p:cNvPr>
@@ -1888,7 +1928,7 @@
           <p:cNvPr id="2" name="Body">
             <a:extLst xmlns:a="http://schemas.openxmlformats.org/drawingml/2006/main">
               <a:ext uri="{FF2B5EF4-FFF2-40B4-BE49-F238E27FC236}">
-                <a16:creationId xmlns:a16="http://schemas.microsoft.com/office/drawing/2014/main" id="{78E3850C-566F-4CF0-B6A2-813138105B3D}"/>
+                <a16:creationId xmlns:a16="http://schemas.microsoft.com/office/drawing/2014/main" id="{4FFD1613-54F7-42BE-96D0-3BB2E6F96B77}"/>
               </a:ext>
             </a:extLst>
           </p:cNvPr>
@@ -2062,7 +2102,7 @@
           <p:cNvPr id="4" name="Title">
             <a:extLst xmlns:a="http://schemas.openxmlformats.org/drawingml/2006/main">
               <a:ext uri="{FF2B5EF4-FFF2-40B4-BE49-F238E27FC236}">
-                <a16:creationId xmlns:a16="http://schemas.microsoft.com/office/drawing/2014/main" id="{C2DC6C68-27A7-48AF-9FE2-C22D70726C20}"/>
+                <a16:creationId xmlns:a16="http://schemas.microsoft.com/office/drawing/2014/main" id="{E031A73C-290B-44EE-978F-3719EBCFB992}"/>
               </a:ext>
             </a:extLst>
           </p:cNvPr>
@@ -2219,7 +2259,7 @@
           <p:cNvPr id="2" name="Left column">
             <a:extLst xmlns:a="http://schemas.openxmlformats.org/drawingml/2006/main">
               <a:ext uri="{FF2B5EF4-FFF2-40B4-BE49-F238E27FC236}">
-                <a16:creationId xmlns:a16="http://schemas.microsoft.com/office/drawing/2014/main" id="{BA746957-4968-4EA8-AF61-DA9352BE3AEE}"/>
+                <a16:creationId xmlns:a16="http://schemas.microsoft.com/office/drawing/2014/main" id="{60FD8605-81EC-4D1B-BB1E-A26E7D6C8042}"/>
               </a:ext>
             </a:extLst>
           </p:cNvPr>
@@ -2376,7 +2416,7 @@
           <p:cNvPr id="3" name="Right column">
             <a:extLst xmlns:a="http://schemas.openxmlformats.org/drawingml/2006/main">
               <a:ext uri="{FF2B5EF4-FFF2-40B4-BE49-F238E27FC236}">
-                <a16:creationId xmlns:a16="http://schemas.microsoft.com/office/drawing/2014/main" id="{B538C742-515C-4EC3-94BD-59DBAD9B9FC6}"/>
+                <a16:creationId xmlns:a16="http://schemas.microsoft.com/office/drawing/2014/main" id="{A0E7A631-ECD9-4307-B5AA-A3AC3BBC5912}"/>
               </a:ext>
             </a:extLst>
           </p:cNvPr>
@@ -2550,7 +2590,7 @@
           <p:cNvPr id="3" name="Title">
             <a:extLst xmlns:a="http://schemas.openxmlformats.org/drawingml/2006/main">
               <a:ext uri="{FF2B5EF4-FFF2-40B4-BE49-F238E27FC236}">
-                <a16:creationId xmlns:a16="http://schemas.microsoft.com/office/drawing/2014/main" id="{86513384-8079-460B-AC1D-0FFE4134A30E}"/>
+                <a16:creationId xmlns:a16="http://schemas.microsoft.com/office/drawing/2014/main" id="{ED31EEAB-024C-4E10-9A7D-CC0035397D05}"/>
               </a:ext>
             </a:extLst>
           </p:cNvPr>
@@ -2707,7 +2747,7 @@
           <p:cNvPr id="2" name="Left column">
             <a:extLst xmlns:a="http://schemas.openxmlformats.org/drawingml/2006/main">
               <a:ext uri="{FF2B5EF4-FFF2-40B4-BE49-F238E27FC236}">
-                <a16:creationId xmlns:a16="http://schemas.microsoft.com/office/drawing/2014/main" id="{907BC8EB-5897-4110-B67B-ED13C11EB1A6}"/>
+                <a16:creationId xmlns:a16="http://schemas.microsoft.com/office/drawing/2014/main" id="{E1CDEE68-A99F-42B4-93E5-6A89EA06B0C3}"/>
               </a:ext>
             </a:extLst>
           </p:cNvPr>
@@ -2902,12 +2942,12 @@
   </p:cSld>
   <p:clrMap bg1="lt1" tx1="dk1" bg2="lt2" tx2="dk2" accent1="accent1" accent2="accent2" accent3="accent3" accent4="accent4" accent5="accent5" accent6="accent6" hlink="hlink" folHlink="folHlink"/>
   <p:sldLayoutIdLst>
-    <p:sldLayoutId xmlns:r="http://schemas.openxmlformats.org/officeDocument/2006/relationships" id="2147483649" r:id="R4bc240d777d948e6"/>
-    <p:sldLayoutId xmlns:r="http://schemas.openxmlformats.org/officeDocument/2006/relationships" id="2147483650" r:id="R62dd6f331ecf401e"/>
-    <p:sldLayoutId xmlns:r="http://schemas.openxmlformats.org/officeDocument/2006/relationships" id="2147483651" r:id="R0dc95430d0fa4bea"/>
-    <p:sldLayoutId xmlns:r="http://schemas.openxmlformats.org/officeDocument/2006/relationships" id="2147483652" r:id="Ref5fc9e8bd684cb5"/>
-    <p:sldLayoutId xmlns:r="http://schemas.openxmlformats.org/officeDocument/2006/relationships" id="2147483653" r:id="R262dd1f9c7e24c8b"/>
-    <p:sldLayoutId xmlns:r="http://schemas.openxmlformats.org/officeDocument/2006/relationships" id="2147483654" r:id="R22d80db2b0bf44ff"/>
+    <p:sldLayoutId xmlns:r="http://schemas.openxmlformats.org/officeDocument/2006/relationships" id="2147483649" r:id="Rb3e7051777564548"/>
+    <p:sldLayoutId xmlns:r="http://schemas.openxmlformats.org/officeDocument/2006/relationships" id="2147483650" r:id="R7617e964547b44a9"/>
+    <p:sldLayoutId xmlns:r="http://schemas.openxmlformats.org/officeDocument/2006/relationships" id="2147483651" r:id="Re7ace65af1e74185"/>
+    <p:sldLayoutId xmlns:r="http://schemas.openxmlformats.org/officeDocument/2006/relationships" id="2147483652" r:id="Rcf427786b8f84dd8"/>
+    <p:sldLayoutId xmlns:r="http://schemas.openxmlformats.org/officeDocument/2006/relationships" id="2147483653" r:id="Ref085c12d8ea4ce1"/>
+    <p:sldLayoutId xmlns:r="http://schemas.openxmlformats.org/officeDocument/2006/relationships" id="2147483654" r:id="R4496c8cdb7e24e1c"/>
   </p:sldLayoutIdLst>
   <p:txStyles>
     <p:titleStyle>
@@ -3458,7 +3498,7 @@
           <ns0:cNvPr id="5" name="Trace, modify and test">
             <ns1:extLst>
               <ns1:ext uri="{FF2B5EF4-FFF2-40B4-BE49-F238E27FC236}">
-                <ns2:creationId id="{07957EEB-8855-45F3-8ED2-E5F915091415}"/>
+                <ns2:creationId id="{5C349841-DC82-4822-A8D7-CCE8DE6EC8E1}"/>
               </ns1:ext>
             </ns1:extLst>
           </ns0:cNvPr>
@@ -3526,7 +3566,7 @@
           <ns0:cNvPr id="2" name="Unit 1 · Week 1 · Lesson 3">
             <ns1:extLst>
               <ns1:ext uri="{FF2B5EF4-FFF2-40B4-BE49-F238E27FC236}">
-                <ns2:creationId id="{D93DB687-E510-4CE1-9492-2D1268629846}"/>
+                <ns2:creationId id="{086963CC-34E0-4F79-BEC6-3DAC6A6DEE51}"/>
               </ns1:ext>
             </ns1:extLst>
           </ns0:cNvPr>
@@ -3592,7 +3632,7 @@
           <ns0:cNvPr id="3" name="Explain what changes as each instruction runs.">
             <ns1:extLst>
               <ns1:ext uri="{FF2B5EF4-FFF2-40B4-BE49-F238E27FC236}">
-                <ns2:creationId id="{56520D60-9BAD-4848-94EA-27276CA7F695}"/>
+                <ns2:creationId id="{B4B6C6ED-513C-4464-AF6A-AC3DCC104348}"/>
               </ns1:ext>
             </ns1:extLst>
           </ns0:cNvPr>
@@ -3658,7 +3698,7 @@
           <ns0:cNvPr id="4" name="U1-W01-L03  ·  1/8  ·  Content CC BY 4.0 / code MIT">
             <ns1:extLst>
               <ns1:ext uri="{FF2B5EF4-FFF2-40B4-BE49-F238E27FC236}">
-                <ns2:creationId id="{EB523CF5-39DB-4573-A44B-B20E50D8FD7E}"/>
+                <ns2:creationId id="{AACC5AE8-E5B8-4AF6-9DFC-CBD8F74032C4}"/>
               </ns1:ext>
             </ns1:extLst>
           </ns0:cNvPr>
@@ -3722,7 +3762,7 @@
     </ns0:spTree>
     <ns0:extLst>
       <ns0:ext uri="{BB962C8B-B14F-4D97-AF65-F5344CB8AC3E}">
-        <ns3:creationId val="21811701"/>
+        <ns3:creationId val="92360814"/>
       </ns0:ext>
     </ns0:extLst>
   </ns0:cSld>
@@ -3753,7 +3793,7 @@
           <ns0:cNvPr id="5" name="Retrieve the script">
             <ns1:extLst>
               <ns1:ext uri="{FF2B5EF4-FFF2-40B4-BE49-F238E27FC236}">
-                <ns2:creationId id="{EE78F49B-E1AC-41F5-A374-29BF47AFA607}"/>
+                <ns2:creationId id="{E70A0BC8-FBCF-455A-8BC7-3CF43C55E3D3}"/>
               </ns1:ext>
             </ns1:extLst>
           </ns0:cNvPr>
@@ -3821,7 +3861,7 @@
           <ns0:cNvPr id="2" name="BADGE_PRICE = 3&#10;quantity = int(input(&quot;Number of badges: &quot;))&#10;">
             <ns1:extLst>
               <ns1:ext uri="{FF2B5EF4-FFF2-40B4-BE49-F238E27FC236}">
-                <ns2:creationId id="{0FC2B3CB-1EE7-46E2-BF44-9F4555D14005}"/>
+                <ns2:creationId id="{6C42B146-3246-4527-96CD-C60973BC69D9}"/>
               </ns1:ext>
             </ns1:extLst>
           </ns0:cNvPr>
@@ -3956,7 +3996,7 @@
           <ns0:cNvPr id="3" name="Predict the output for quantity 5.">
             <ns1:extLst>
               <ns1:ext uri="{FF2B5EF4-FFF2-40B4-BE49-F238E27FC236}">
-                <ns2:creationId id="{7D82F332-1C29-4353-8642-B22F9FCF521A}"/>
+                <ns2:creationId id="{ACF1B3A0-9EB2-4E79-AEAC-65990B5836B1}"/>
               </ns1:ext>
             </ns1:extLst>
           </ns0:cNvPr>
@@ -4022,7 +4062,7 @@
           <ns0:cNvPr id="4" name="U1-W01-L03  ·  2/8  ·  Content CC BY 4.0 / code MIT">
             <ns1:extLst>
               <ns1:ext uri="{FF2B5EF4-FFF2-40B4-BE49-F238E27FC236}">
-                <ns2:creationId id="{459976F4-5E08-42E9-995F-DD7D112F67A4}"/>
+                <ns2:creationId id="{76AF1BF8-5D8A-4CAA-89CD-D1B14654A959}"/>
               </ns1:ext>
             </ns1:extLst>
           </ns0:cNvPr>
@@ -4086,7 +4126,7 @@
     </ns0:spTree>
     <ns0:extLst>
       <ns0:ext uri="{BB962C8B-B14F-4D97-AF65-F5344CB8AC3E}">
-        <ns3:creationId val="647772377"/>
+        <ns3:creationId val="1448748044"/>
       </ns0:ext>
     </ns0:extLst>
   </ns0:cSld>
@@ -4117,7 +4157,7 @@
           <ns0:cNvPr id="6" name="Today’s goal">
             <ns1:extLst>
               <ns1:ext uri="{FF2B5EF4-FFF2-40B4-BE49-F238E27FC236}">
-                <ns2:creationId id="{52C268A7-DE96-44D9-988E-C1994FA0E9E8}"/>
+                <ns2:creationId id="{D22B4F2F-8E83-459D-A179-3117F6664158}"/>
               </ns1:ext>
             </ns1:extLst>
           </ns0:cNvPr>
@@ -4185,7 +4225,7 @@
           <ns0:cNvPr id="2" name="Trace variable values in execution order.">
             <ns1:extLst>
               <ns1:ext uri="{FF2B5EF4-FFF2-40B4-BE49-F238E27FC236}">
-                <ns2:creationId id="{71004055-49B0-4734-B1A9-4C56AF8C8968}"/>
+                <ns2:creationId id="{308C1E68-37F8-48F9-98B9-B0BC70254416}"/>
               </ns1:ext>
             </ns1:extLst>
           </ns0:cNvPr>
@@ -4251,7 +4291,7 @@
           <ns0:cNvPr id="3" name="Modify a calculation to match a requirement.">
             <ns1:extLst>
               <ns1:ext uri="{FF2B5EF4-FFF2-40B4-BE49-F238E27FC236}">
-                <ns2:creationId id="{B7E4A9A3-AD8B-4789-9F0C-6A60D8A6A9ED}"/>
+                <ns2:creationId id="{2D9B544F-59A9-407F-90BA-A7956FBCBA8D}"/>
               </ns1:ext>
             </ns1:extLst>
           </ns0:cNvPr>
@@ -4317,7 +4357,7 @@
           <ns0:cNvPr id="4" name="Record expected and actual results.">
             <ns1:extLst>
               <ns1:ext uri="{FF2B5EF4-FFF2-40B4-BE49-F238E27FC236}">
-                <ns2:creationId id="{7865151D-6BFF-4266-AB92-4CAAA0F6A419}"/>
+                <ns2:creationId id="{C31E7EBA-0873-42AC-9260-C8C8F6C4FDF7}"/>
               </ns1:ext>
             </ns1:extLst>
           </ns0:cNvPr>
@@ -4383,7 +4423,7 @@
           <ns0:cNvPr id="5" name="U1-W01-L03  ·  3/8  ·  Content CC BY 4.0 / code MIT">
             <ns1:extLst>
               <ns1:ext uri="{FF2B5EF4-FFF2-40B4-BE49-F238E27FC236}">
-                <ns2:creationId id="{C07CE8D5-B340-4586-B058-2ED18F73DCD1}"/>
+                <ns2:creationId id="{CD5611CA-FBA5-4CAA-81E8-C2AADA9FD5FB}"/>
               </ns1:ext>
             </ns1:extLst>
           </ns0:cNvPr>
@@ -4447,7 +4487,7 @@
     </ns0:spTree>
     <ns0:extLst>
       <ns0:ext uri="{BB962C8B-B14F-4D97-AF65-F5344CB8AC3E}">
-        <ns3:creationId val="1301588435"/>
+        <ns3:creationId val="779028475"/>
       </ns0:ext>
     </ns0:extLst>
   </ns0:cSld>
@@ -4478,7 +4518,7 @@
           <ns0:cNvPr id="4" name="Trace four badges">
             <ns1:extLst>
               <ns1:ext uri="{FF2B5EF4-FFF2-40B4-BE49-F238E27FC236}">
-                <ns2:creationId id="{BBAAADC9-9392-4083-A486-5FD3584340F9}"/>
+                <ns2:creationId id="{27A51FFE-B921-42E1-95A5-CE5E7DAF96A4}"/>
               </ns1:ext>
             </ns1:extLst>
           </ns0:cNvPr>
@@ -4546,7 +4586,7 @@
           <ns0:cNvPr id="2" name="">
             <ns1:extLst>
               <ns1:ext uri="{FF2B5EF4-FFF2-40B4-BE49-F238E27FC236}">
-                <ns2:creationId id="{E845D97E-3DE2-4F1B-B6AA-77CED4348788}"/>
+                <ns2:creationId id="{A6D2DFB9-9032-47AE-9B79-C3EC0717C7AA}"/>
               </ns1:ext>
             </ns1:extLst>
           </ns0:cNvPr>
@@ -4986,7 +5026,7 @@
           <ns0:cNvPr id="3" name="U1-W01-L03  ·  4/8  ·  Content CC BY 4.0 / code MIT">
             <ns1:extLst>
               <ns1:ext uri="{FF2B5EF4-FFF2-40B4-BE49-F238E27FC236}">
-                <ns2:creationId id="{EE908A31-ADF8-4BF0-BA4E-DC935A98F29A}"/>
+                <ns2:creationId id="{B3C01AFB-13B1-4F7A-991E-933391112951}"/>
               </ns1:ext>
             </ns1:extLst>
           </ns0:cNvPr>
@@ -5050,7 +5090,7 @@
     </ns0:spTree>
     <ns0:extLst>
       <ns0:ext uri="{BB962C8B-B14F-4D97-AF65-F5344CB8AC3E}">
-        <ns3:creationId val="403863270"/>
+        <ns3:creationId val="851694229"/>
       </ns0:ext>
     </ns0:extLst>
   </ns0:cSld>
@@ -5081,7 +5121,7 @@
           <ns0:cNvPr id="6" name="Add a fixed packaging charge">
             <ns1:extLst>
               <ns1:ext uri="{FF2B5EF4-FFF2-40B4-BE49-F238E27FC236}">
-                <ns2:creationId id="{FBCECFF7-B29B-4759-83A1-1AE7FB66EC84}"/>
+                <ns2:creationId id="{1BA2DC93-3420-4664-9909-937FD8F4B797}"/>
               </ns1:ext>
             </ns1:extLst>
           </ns0:cNvPr>
@@ -5149,7 +5189,7 @@
           <ns0:cNvPr id="2" name="PACKAGING = 2&#10;total = quantity * BADGE_PRICE + PACKAGING">
             <ns1:extLst>
               <ns1:ext uri="{FF2B5EF4-FFF2-40B4-BE49-F238E27FC236}">
-                <ns2:creationId id="{33782A56-CFB3-4B61-B1BB-4F0E83DD4D95}"/>
+                <ns2:creationId id="{F34F80CB-C35C-4673-ADFC-9F338442FF9F}"/>
               </ns1:ext>
             </ns1:extLst>
           </ns0:cNvPr>
@@ -5238,7 +5278,7 @@
           <ns0:cNvPr id="3" name="The $2 charge applies to every order, including zero badges.">
             <ns1:extLst>
               <ns1:ext uri="{FF2B5EF4-FFF2-40B4-BE49-F238E27FC236}">
-                <ns2:creationId id="{A2F29816-FFF8-4F40-8BEA-6A3AFAFF13CC}"/>
+                <ns2:creationId id="{CF6061DA-B81F-44ED-BD19-157A28CFF362}"/>
               </ns1:ext>
             </ns1:extLst>
           </ns0:cNvPr>
@@ -5304,7 +5344,7 @@
           <ns0:cNvPr id="4" name="Predict the totals for quantities 0 and 3.">
             <ns1:extLst>
               <ns1:ext uri="{FF2B5EF4-FFF2-40B4-BE49-F238E27FC236}">
-                <ns2:creationId id="{ADE7FA18-B6A9-40FF-AA15-66C62BC37D60}"/>
+                <ns2:creationId id="{B02DAB63-8117-42CB-BF3F-924D649758D5}"/>
               </ns1:ext>
             </ns1:extLst>
           </ns0:cNvPr>
@@ -5370,7 +5410,7 @@
           <ns0:cNvPr id="5" name="U1-W01-L03  ·  5/8  ·  Content CC BY 4.0 / code MIT">
             <ns1:extLst>
               <ns1:ext uri="{FF2B5EF4-FFF2-40B4-BE49-F238E27FC236}">
-                <ns2:creationId id="{B35C68D5-96C5-441D-9035-F112DFCC8578}"/>
+                <ns2:creationId id="{8AE53537-E347-4CFA-9CD1-0A67984218CF}"/>
               </ns1:ext>
             </ns1:extLst>
           </ns0:cNvPr>
@@ -5434,7 +5474,7 @@
     </ns0:spTree>
     <ns0:extLst>
       <ns0:ext uri="{BB962C8B-B14F-4D97-AF65-F5344CB8AC3E}">
-        <ns3:creationId val="182085566"/>
+        <ns3:creationId val="768760674"/>
       </ns0:ext>
     </ns0:extLst>
   </ns0:cSld>
@@ -5465,7 +5505,7 @@
           <ns0:cNvPr id="4" name="Test the modified program">
             <ns1:extLst>
               <ns1:ext uri="{FF2B5EF4-FFF2-40B4-BE49-F238E27FC236}">
-                <ns2:creationId id="{D72F26CB-3B04-4878-9292-B0F4ACDE5032}"/>
+                <ns2:creationId id="{16F2999A-2957-4CE0-9876-90DD0470112E}"/>
               </ns1:ext>
             </ns1:extLst>
           </ns0:cNvPr>
@@ -5533,7 +5573,7 @@
           <ns0:cNvPr id="2" name="">
             <ns1:extLst>
               <ns1:ext uri="{FF2B5EF4-FFF2-40B4-BE49-F238E27FC236}">
-                <ns2:creationId id="{29E670B3-5936-4613-9AB5-2020017A8BB0}"/>
+                <ns2:creationId id="{B7B086B8-4C1D-49F4-AC22-C6DE552D4D1F}"/>
               </ns1:ext>
             </ns1:extLst>
           </ns0:cNvPr>
@@ -6044,7 +6084,7 @@
           <ns0:cNvPr id="3" name="U1-W01-L03  ·  6/8  ·  Content CC BY 4.0 / code MIT">
             <ns1:extLst>
               <ns1:ext uri="{FF2B5EF4-FFF2-40B4-BE49-F238E27FC236}">
-                <ns2:creationId id="{54A58992-8864-4415-9866-CBBFBB453BE8}"/>
+                <ns2:creationId id="{997E2EF5-5004-411F-8D8B-4800758DD9D2}"/>
               </ns1:ext>
             </ns1:extLst>
           </ns0:cNvPr>
@@ -6108,7 +6148,7 @@
     </ns0:spTree>
     <ns0:extLst>
       <ns0:ext uri="{BB962C8B-B14F-4D97-AF65-F5344CB8AC3E}">
-        <ns3:creationId val="710916976"/>
+        <ns3:creationId val="366075157"/>
       </ns0:ext>
     </ns0:extLst>
   </ns0:cSld>
@@ -6136,10 +6176,10 @@
       </ns0:grpSpPr>
       <ns0:sp>
         <ns0:nvSpPr>
-          <ns0:cNvPr id="6" name="A program can run and be wrong">
+          <ns0:cNvPr id="7" name="Two rules, different costs">
             <ns1:extLst>
               <ns1:ext uri="{FF2B5EF4-FFF2-40B4-BE49-F238E27FC236}">
-                <ns2:creationId id="{1415F876-4DC1-402A-A779-3851C1B0C158}"/>
+                <ns2:creationId id="{4D9F5A6F-1891-4C5C-86C4-E38A6C79D24C}"/>
               </ns1:ext>
             </ns1:extLst>
           </ns0:cNvPr>
@@ -6197,17 +6237,17 @@
                 <ns1:ea typeface="Arial"/>
                 <ns1:cs typeface="Arial"/>
               </ns1:rPr>
-              <ns1:t>A program can run and be wrong</ns1:t>
+              <ns1:t>Two rules, different costs</ns1:t>
             </ns1:r>
           </ns1:p>
         </ns0:txBody>
       </ns0:sp>
       <ns0:sp>
         <ns0:nvSpPr>
-          <ns0:cNvPr id="2" name="Syntax error: Python cannot parse the instructions.">
+          <ns0:cNvPr id="2" name="For quantity 3, which rule charges packaging once?">
             <ns1:extLst>
               <ns1:ext uri="{FF2B5EF4-FFF2-40B4-BE49-F238E27FC236}">
-                <ns2:creationId id="{FE5A4EBB-EE29-4491-A94C-17B5FC61FB89}"/>
+                <ns2:creationId id="{85C9937B-A72B-40AE-A4C4-8E10CE51844E}"/>
               </ns1:ext>
             </ns1:extLst>
           </ns0:cNvPr>
@@ -6263,17 +6303,17 @@
                 <ns1:ea typeface="Arial"/>
                 <ns1:cs typeface="Arial"/>
               </ns1:rPr>
-              <ns1:t>Syntax error: Python cannot parse the instructions.</ns1:t>
+              <ns1:t>For quantity 3, which rule charges packaging once?</ns1:t>
             </ns1:r>
           </ns1:p>
         </ns0:txBody>
       </ns0:sp>
       <ns0:sp>
         <ns0:nvSpPr>
-          <ns0:cNvPr id="3" name="Logic error: the instructions produce the wrong result.">
+          <ns0:cNvPr id="3" name="A: quantity × 3 + 2     B: quantity × (3 + 2)">
             <ns1:extLst>
               <ns1:ext uri="{FF2B5EF4-FFF2-40B4-BE49-F238E27FC236}">
-                <ns2:creationId id="{719D5C92-04CD-4EF6-AFE5-CCB65604592C}"/>
+                <ns2:creationId id="{6BEF5BCF-2337-4ED5-9428-048ECDF7469D}"/>
               </ns1:ext>
             </ns1:extLst>
           </ns0:cNvPr>
@@ -6329,17 +6369,17 @@
                 <ns1:ea typeface="Arial"/>
                 <ns1:cs typeface="Arial"/>
               </ns1:rPr>
-              <ns1:t>Logic error: the instructions produce the wrong result.</ns1:t>
+              <ns1:t>A: quantity × 3 + 2     B: quantity × (3 + 2)</ns1:t>
             </ns1:r>
           </ns1:p>
         </ns0:txBody>
       </ns0:sp>
       <ns0:sp>
         <ns0:nvSpPr>
-          <ns0:cNvPr id="4" name="Compare quantity × 3 + 2 with quantity × (3 + 2).">
+          <ns0:cNvPr id="4" name="Choose alone, then explain to a partner.">
             <ns1:extLst>
               <ns1:ext uri="{FF2B5EF4-FFF2-40B4-BE49-F238E27FC236}">
-                <ns2:creationId id="{3D3C0865-FC54-4075-96BC-22CC6D058659}"/>
+                <ns2:creationId id="{84658CB4-1411-463F-9E6F-410FF4C63030}"/>
               </ns1:ext>
             </ns1:extLst>
           </ns0:cNvPr>
@@ -6395,17 +6435,83 @@
                 <ns1:ea typeface="Arial"/>
                 <ns1:cs typeface="Arial"/>
               </ns1:rPr>
-              <ns1:t>Compare quantity × 3 + 2 with quantity × (3 + 2).</ns1:t>
+              <ns1:t>Choose alone, then explain to a partner.</ns1:t>
             </ns1:r>
           </ns1:p>
         </ns0:txBody>
       </ns0:sp>
       <ns0:sp>
         <ns0:nvSpPr>
-          <ns0:cNvPr id="5" name="U1-W01-L03  ·  7/8  ·  Content CC BY 4.0 / code MIT">
+          <ns0:cNvPr id="5" name="Why does a test with quantity 1 miss the error?">
             <ns1:extLst>
               <ns1:ext uri="{FF2B5EF4-FFF2-40B4-BE49-F238E27FC236}">
-                <ns2:creationId id="{A8E2A07E-7BE3-4A6B-9573-1ABC6440BDF3}"/>
+                <ns2:creationId id="{F05F066D-94F7-4A75-B326-FD98DF006495}"/>
+              </ns1:ext>
+            </ns1:extLst>
+          </ns0:cNvPr>
+          <ns0:cNvSpPr>
+            <ns1:spLocks noGrp="1"/>
+          </ns0:cNvSpPr>
+          <ns0:nvPr/>
+        </ns0:nvSpPr>
+        <ns0:spPr>
+          <ns1:xfrm>
+            <ns1:off x="685800" y="4305300"/>
+            <ns1:ext cx="10820400" cy="714375"/>
+          </ns1:xfrm>
+          <ns1:prstGeom prst="rect">
+            <ns1:avLst/>
+          </ns1:prstGeom>
+          <ns1:noFill/>
+          <ns1:ln w="0">
+            <ns1:noFill/>
+          </ns1:ln>
+        </ns0:spPr>
+        <ns0:txBody>
+          <ns1:bodyPr/>
+          <ns1:lstStyle>
+            <ns1:defPPr>
+              <ns1:defRPr sz="2400" b="0">
+                <ns1:solidFill>
+                  <ns1:srgbClr val="18322D"/>
+                </ns1:solidFill>
+                <ns1:latin typeface="Arial"/>
+                <ns1:ea typeface="Arial"/>
+                <ns1:cs typeface="Arial"/>
+              </ns1:defRPr>
+            </ns1:defPPr>
+          </ns1:lstStyle>
+          <ns1:p>
+            <ns1:pPr>
+              <ns1:defRPr sz="2400" b="0">
+                <ns1:solidFill>
+                  <ns1:srgbClr val="18322D"/>
+                </ns1:solidFill>
+                <ns1:latin typeface="Arial"/>
+                <ns1:ea typeface="Arial"/>
+                <ns1:cs typeface="Arial"/>
+              </ns1:defRPr>
+            </ns1:pPr>
+            <ns1:r>
+              <ns1:rPr sz="2400" b="0">
+                <ns1:solidFill>
+                  <ns1:srgbClr val="18322D"/>
+                </ns1:solidFill>
+                <ns1:latin typeface="Arial"/>
+                <ns1:ea typeface="Arial"/>
+                <ns1:cs typeface="Arial"/>
+              </ns1:rPr>
+              <ns1:t>Why does a test with quantity 1 miss the error?</ns1:t>
+            </ns1:r>
+          </ns1:p>
+        </ns0:txBody>
+      </ns0:sp>
+      <ns0:sp>
+        <ns0:nvSpPr>
+          <ns0:cNvPr id="6" name="U1-W01-L03  ·  7/8  ·  Content CC BY 4.0 / code MIT">
+            <ns1:extLst>
+              <ns1:ext uri="{FF2B5EF4-FFF2-40B4-BE49-F238E27FC236}">
+                <ns2:creationId id="{02369B7B-16FB-40C2-B12E-F40236DCBD94}"/>
               </ns1:ext>
             </ns1:extLst>
           </ns0:cNvPr>
@@ -6469,7 +6575,7 @@
     </ns0:spTree>
     <ns0:extLst>
       <ns0:ext uri="{BB962C8B-B14F-4D97-AF65-F5344CB8AC3E}">
-        <ns3:creationId val="732736277"/>
+        <ns3:creationId val="870811159"/>
       </ns0:ext>
     </ns0:extLst>
   </ns0:cSld>
@@ -6500,7 +6606,7 @@
           <ns0:cNvPr id="7" name="Exit check: a changed order">
             <ns1:extLst>
               <ns1:ext uri="{FF2B5EF4-FFF2-40B4-BE49-F238E27FC236}">
-                <ns2:creationId id="{B1606F95-8AD1-4258-B89F-FA08AE14DFAF}"/>
+                <ns2:creationId id="{44D921E7-A4AF-49A4-A3BF-6425928D99D0}"/>
               </ns1:ext>
             </ns1:extLst>
           </ns0:cNvPr>
@@ -6565,10 +6671,10 @@
       </ns0:sp>
       <ns0:sp>
         <ns0:nvSpPr>
-          <ns0:cNvPr id="2" name="Badges cost $3 each; packaging is $2 per order.">
+          <ns0:cNvPr id="2" name="Badges cost $3 each. Packaging is $2 per order.">
             <ns1:extLst>
               <ns1:ext uri="{FF2B5EF4-FFF2-40B4-BE49-F238E27FC236}">
-                <ns2:creationId id="{D731E517-CC87-421F-86FF-869890378A4A}"/>
+                <ns2:creationId id="{FCBF1CD2-99B2-4B8F-A8BD-E53C9D39701C}"/>
               </ns1:ext>
             </ns1:extLst>
           </ns0:cNvPr>
@@ -6624,7 +6730,7 @@
                 <ns1:ea typeface="Arial"/>
                 <ns1:cs typeface="Arial"/>
               </ns1:rPr>
-              <ns1:t>Badges cost $3 each; packaging is $2 per order.</ns1:t>
+              <ns1:t>Badges cost $3 each. Packaging is $2 per order.</ns1:t>
             </ns1:r>
           </ns1:p>
         </ns0:txBody>
@@ -6634,7 +6740,7 @@
           <ns0:cNvPr id="3" name="Predict the cost of six badges.">
             <ns1:extLst>
               <ns1:ext uri="{FF2B5EF4-FFF2-40B4-BE49-F238E27FC236}">
-                <ns2:creationId id="{7E3D42C1-FFE1-4148-B881-B805BDA7AB0B}"/>
+                <ns2:creationId id="{D52B7C06-6364-4262-97F8-7DCAA1D03AF0}"/>
               </ns1:ext>
             </ns1:extLst>
           </ns0:cNvPr>
@@ -6697,10 +6803,10 @@
       </ns0:sp>
       <ns0:sp>
         <ns0:nvSpPr>
-          <ns0:cNvPr id="4" name="Name one useful zero/boundary test.">
+          <ns0:cNvPr id="4" name="Give the expected result for quantity 0.">
             <ns1:extLst>
               <ns1:ext uri="{FF2B5EF4-FFF2-40B4-BE49-F238E27FC236}">
-                <ns2:creationId id="{3A2EE0B7-31F6-4E25-8BF5-3657635DC8F0}"/>
+                <ns2:creationId id="{C311BDE1-FC3C-4F7A-9D83-417E4FD356BC}"/>
               </ns1:ext>
             </ns1:extLst>
           </ns0:cNvPr>
@@ -6756,17 +6862,17 @@
                 <ns1:ea typeface="Arial"/>
                 <ns1:cs typeface="Arial"/>
               </ns1:rPr>
-              <ns1:t>Name one useful zero/boundary test.</ns1:t>
+              <ns1:t>Give the expected result for quantity 0.</ns1:t>
             </ns1:r>
           </ns1:p>
         </ns0:txBody>
       </ns0:sp>
       <ns0:sp>
         <ns0:nvSpPr>
-          <ns0:cNvPr id="5" name="Explain how you know the calculation is correct.">
+          <ns0:cNvPr id="5" name="Explain which test could reveal a packaging error.">
             <ns1:extLst>
               <ns1:ext uri="{FF2B5EF4-FFF2-40B4-BE49-F238E27FC236}">
-                <ns2:creationId id="{FA786B2A-954E-4999-BBE1-786CCB4FE749}"/>
+                <ns2:creationId id="{8F9CAFD5-0105-44EA-9C69-45A16C7F04A6}"/>
               </ns1:ext>
             </ns1:extLst>
           </ns0:cNvPr>
@@ -6822,7 +6928,7 @@
                 <ns1:ea typeface="Arial"/>
                 <ns1:cs typeface="Arial"/>
               </ns1:rPr>
-              <ns1:t>Explain how you know the calculation is correct.</ns1:t>
+              <ns1:t>Explain which test could reveal a packaging error.</ns1:t>
             </ns1:r>
           </ns1:p>
         </ns0:txBody>
@@ -6832,7 +6938,7 @@
           <ns0:cNvPr id="6" name="U1-W01-L03  ·  8/8  ·  Content CC BY 4.0 / code MIT">
             <ns1:extLst>
               <ns1:ext uri="{FF2B5EF4-FFF2-40B4-BE49-F238E27FC236}">
-                <ns2:creationId id="{6E1B0353-2C8D-4326-9E96-A30723277982}"/>
+                <ns2:creationId id="{7DA0C28D-8FEA-4536-BF5C-6F1374D75768}"/>
               </ns1:ext>
             </ns1:extLst>
           </ns0:cNvPr>
@@ -6896,7 +7002,7 @@
     </ns0:spTree>
     <ns0:extLst>
       <ns0:ext uri="{BB962C8B-B14F-4D97-AF65-F5344CB8AC3E}">
-        <ns3:creationId val="370295855"/>
+        <ns3:creationId val="2109307574"/>
       </ns0:ext>
     </ns0:extLst>
   </ns0:cSld>
